--- a/downloads/DCT_V1_Ch09_Slides.pptx
+++ b/downloads/DCT_V1_Ch09_Slides.pptx
@@ -130,7 +130,7 @@
   <p:extLst>
     <p:ext uri="{521415D9-36F7-43E2-AB2F-B90AF26B5E84}">
       <p14:sectionLst xmlns:p14="http://schemas.microsoft.com/office/powerpoint/2010/main">
-        <p14:section name="Opening" id="{9ffb8dfd-41f3-564f-c021-532420da4f17}">
+        <p14:section name="Opening" id="{be3248ea-cc83-5112-6070-7360e5e9c77c}">
           <p14:sldIdLst>
             <p14:sldId id="256"/>
             <p14:sldId id="257"/>
@@ -138,51 +138,51 @@
             <p14:sldId id="259"/>
           </p14:sldIdLst>
         </p14:section>
-        <p14:section name="9.1 From Org Chart to Wiring Diagram" id="{6278b999-ad2e-99b6-cd73-fce4dff3676d}">
+        <p14:section name="9.1 From Org Chart to Wiring Diagram" id="{c4e22142-dcc7-6f02-0231-881a7a840d63}">
           <p14:sldIdLst>
             <p14:sldId id="260"/>
           </p14:sldIdLst>
         </p14:section>
-        <p14:section name="9.2 Architecture versus Representation" id="{fa16d442-3361-02a6-f7f4-52ccbde4af80}">
+        <p14:section name="9.2 Architecture versus Representation" id="{2885ee7f-8597-7827-5821-3e06e6c0ad15}">
           <p14:sldIdLst>
             <p14:sldId id="261"/>
             <p14:sldId id="262"/>
           </p14:sldIdLst>
         </p14:section>
-        <p14:section name="9.3 Enterprise Topology and State Dependencies" id="{efc2318d-27b2-9d79-04ed-c0656ffe15e4}">
+        <p14:section name="9.3 Enterprise Topology and State Dependencies" id="{913de863-ea0e-9ca8-f25c-7eb1a38ac46f}">
           <p14:sldIdLst>
             <p14:sldId id="263"/>
             <p14:sldId id="264"/>
           </p14:sldIdLst>
         </p14:section>
-        <p14:section name="9.4 Structural Dependency and Propagation" id="{8e6e531b-f725-b9b3-1e2d-82916ab0cb40}">
+        <p14:section name="9.4 Structural Dependency and Propagation" id="{06e54d8b-9c37-f580-8719-214ed6b8e42d}">
           <p14:sldIdLst>
             <p14:sldId id="265"/>
           </p14:sldIdLst>
         </p14:section>
-        <p14:section name="9.5 Hierarchical Enterprise States" id="{b6e2d616-d8d1-2270-a85d-13ff3420a28b}">
+        <p14:section name="9.5 Hierarchical Enterprise States" id="{3cf11a9f-8b16-1e0b-7946-ef6fdf06150a}">
           <p14:sldIdLst>
             <p14:sldId id="266"/>
           </p14:sldIdLst>
         </p14:section>
-        <p14:section name="9.6 Architectural Constraints and Consistency" id="{01bf75ec-cebd-2afa-8c8d-94267d438a9e}">
+        <p14:section name="9.6 Architectural Constraints and Consistency" id="{18df53f0-b5b8-4ab4-68cb-668172686bb7}">
           <p14:sldIdLst>
             <p14:sldId id="267"/>
             <p14:sldId id="268"/>
           </p14:sldIdLst>
         </p14:section>
-        <p14:section name="9.7 Architectural Completeness and Validation" id="{da27d1c2-a6f9-f9c9-3a6b-63bc74fb8fef}">
+        <p14:section name="9.7 Architectural Completeness and Validation" id="{ed708a6c-2775-fbc4-783a-3edbfd7a5e66}">
           <p14:sldIdLst>
             <p14:sldId id="269"/>
           </p14:sldIdLst>
         </p14:section>
-        <p14:section name="9.8 Architecture Metrics and Complexity" id="{e14843ce-9ac1-03f7-bc52-35e8f99b6c22}">
+        <p14:section name="9.8 Architecture Metrics and Complexity" id="{a822d5e6-d104-129e-0dc6-90c153a539b2}">
           <p14:sldIdLst>
             <p14:sldId id="270"/>
             <p14:sldId id="271"/>
           </p14:sldIdLst>
         </p14:section>
-        <p14:section name="Worked Example 9.1" id="{46a6509d-67b8-fe59-25ae-e7f7618431cb}">
+        <p14:section name="Worked Example 9.1" id="{c3ad25b5-933f-2785-2668-0a458b796cf0}">
           <p14:sldIdLst>
             <p14:sldId id="272"/>
             <p14:sldId id="273"/>
@@ -190,12 +190,12 @@
             <p14:sldId id="275"/>
           </p14:sldIdLst>
         </p14:section>
-        <p14:section name="AXIOM Lab 1.9" id="{2d8cca3a-aa12-01e6-f472-61de32ad3d0c}">
+        <p14:section name="AXIOM Lab 1.9" id="{9df0ee2a-340c-8972-79c6-14f6ca31ff83}">
           <p14:sldIdLst>
             <p14:sldId id="276"/>
           </p14:sldIdLst>
         </p14:section>
-        <p14:section name="Close" id="{9ee679df-0924-be77-21ee-77b1e27b5c49}">
+        <p14:section name="Close" id="{802c111b-b4ea-bd71-e23b-230adafbf952}">
           <p14:sldIdLst>
             <p14:sldId id="277"/>
             <p14:sldId id="278"/>

--- a/downloads/DCT_V1_Ch09_Slides.pptx
+++ b/downloads/DCT_V1_Ch09_Slides.pptx
@@ -130,7 +130,7 @@
   <p:extLst>
     <p:ext uri="{521415D9-36F7-43E2-AB2F-B90AF26B5E84}">
       <p14:sectionLst xmlns:p14="http://schemas.microsoft.com/office/powerpoint/2010/main">
-        <p14:section name="Opening" id="{be3248ea-cc83-5112-6070-7360e5e9c77c}">
+        <p14:section name="Opening" id="{012284f5-7f36-89d3-67ef-55e0b8424b11}">
           <p14:sldIdLst>
             <p14:sldId id="256"/>
             <p14:sldId id="257"/>
@@ -138,51 +138,51 @@
             <p14:sldId id="259"/>
           </p14:sldIdLst>
         </p14:section>
-        <p14:section name="9.1 From Org Chart to Wiring Diagram" id="{c4e22142-dcc7-6f02-0231-881a7a840d63}">
+        <p14:section name="9.1 From Org Chart to Wiring Diagram" id="{efc488dd-0f48-ba5d-0c2d-0d27a0139e0e}">
           <p14:sldIdLst>
             <p14:sldId id="260"/>
           </p14:sldIdLst>
         </p14:section>
-        <p14:section name="9.2 Architecture versus Representation" id="{2885ee7f-8597-7827-5821-3e06e6c0ad15}">
+        <p14:section name="9.2 Architecture versus Representation" id="{c0631232-8803-5a30-7509-db55d970a4d2}">
           <p14:sldIdLst>
             <p14:sldId id="261"/>
             <p14:sldId id="262"/>
           </p14:sldIdLst>
         </p14:section>
-        <p14:section name="9.3 Enterprise Topology and State Dependencies" id="{913de863-ea0e-9ca8-f25c-7eb1a38ac46f}">
+        <p14:section name="9.3 Enterprise Topology and State Dependencies" id="{b3c5fe58-b22e-f5e9-53fb-29dd37f1752c}">
           <p14:sldIdLst>
             <p14:sldId id="263"/>
             <p14:sldId id="264"/>
           </p14:sldIdLst>
         </p14:section>
-        <p14:section name="9.4 Structural Dependency and Propagation" id="{06e54d8b-9c37-f580-8719-214ed6b8e42d}">
+        <p14:section name="9.4 Structural Dependency and Propagation" id="{bd0068f8-dbad-64fd-f471-783799a2ba12}">
           <p14:sldIdLst>
             <p14:sldId id="265"/>
           </p14:sldIdLst>
         </p14:section>
-        <p14:section name="9.5 Hierarchical Enterprise States" id="{3cf11a9f-8b16-1e0b-7946-ef6fdf06150a}">
+        <p14:section name="9.5 Hierarchical Enterprise States" id="{9d667ce1-ff3e-21ef-b3b4-c9b50be4c6b5}">
           <p14:sldIdLst>
             <p14:sldId id="266"/>
           </p14:sldIdLst>
         </p14:section>
-        <p14:section name="9.6 Architectural Constraints and Consistency" id="{18df53f0-b5b8-4ab4-68cb-668172686bb7}">
+        <p14:section name="9.6 Architectural Constraints and Consistency" id="{fb2fad12-c254-f048-fe39-f0b1b39cefec}">
           <p14:sldIdLst>
             <p14:sldId id="267"/>
             <p14:sldId id="268"/>
           </p14:sldIdLst>
         </p14:section>
-        <p14:section name="9.7 Architectural Completeness and Validation" id="{ed708a6c-2775-fbc4-783a-3edbfd7a5e66}">
+        <p14:section name="9.7 Architectural Completeness and Validation" id="{c59f9d46-3bda-f67c-1fd9-52cb3ea502da}">
           <p14:sldIdLst>
             <p14:sldId id="269"/>
           </p14:sldIdLst>
         </p14:section>
-        <p14:section name="9.8 Architecture Metrics and Complexity" id="{a822d5e6-d104-129e-0dc6-90c153a539b2}">
+        <p14:section name="9.8 Architecture Metrics and Complexity" id="{673693b9-2221-f4e7-bcd8-cf8630e9423f}">
           <p14:sldIdLst>
             <p14:sldId id="270"/>
             <p14:sldId id="271"/>
           </p14:sldIdLst>
         </p14:section>
-        <p14:section name="Worked Example 9.1" id="{c3ad25b5-933f-2785-2668-0a458b796cf0}">
+        <p14:section name="Worked Example 9.1" id="{a209c1ee-a9f1-f037-8fd3-7d0a7d375d80}">
           <p14:sldIdLst>
             <p14:sldId id="272"/>
             <p14:sldId id="273"/>
@@ -190,12 +190,12 @@
             <p14:sldId id="275"/>
           </p14:sldIdLst>
         </p14:section>
-        <p14:section name="AXIOM Lab 1.9" id="{9df0ee2a-340c-8972-79c6-14f6ca31ff83}">
+        <p14:section name="AXIOM Lab 1.9" id="{5473bc5a-0bf2-8bb8-5f70-32dcadd43514}">
           <p14:sldIdLst>
             <p14:sldId id="276"/>
           </p14:sldIdLst>
         </p14:section>
-        <p14:section name="Close" id="{802c111b-b4ea-bd71-e23b-230adafbf952}">
+        <p14:section name="Close" id="{12328682-130b-e2cc-9b1e-4fdb1d6a0a1f}">
           <p14:sldIdLst>
             <p14:sldId id="277"/>
             <p14:sldId id="278"/>
